--- a/Classificazione_wine.pptx
+++ b/Classificazione_wine.pptx
@@ -8,7 +8,7 @@
     <p:notesMasterId r:id="rId15"/>
   </p:notesMasterIdLst>
   <p:sldIdLst>
-    <p:sldId id="256" r:id="rId2"/>
+    <p:sldId id="271" r:id="rId2"/>
     <p:sldId id="257" r:id="rId3"/>
     <p:sldId id="258" r:id="rId4"/>
     <p:sldId id="259" r:id="rId5"/>
@@ -142,14 +142,6 @@
 <p188:authorLst xmlns:a="http://schemas.openxmlformats.org/drawingml/2006/main" xmlns:r="http://schemas.openxmlformats.org/officeDocument/2006/relationships" xmlns:p188="http://schemas.microsoft.com/office/powerpoint/2018/8/main">
   <p188:author id="{EFCA2978-F8D1-778A-DEA3-74FCECBA0F17}" name="Claudia Nepa" initials="CN" userId="ddea735df1512ebe" providerId="Windows Live"/>
 </p188:authorLst>
-</file>
-
-<file path=ppt/revisionInfo.xml><?xml version="1.0" encoding="utf-8"?>
-<p1510:revInfo xmlns:a="http://schemas.openxmlformats.org/drawingml/2006/main" xmlns:r="http://schemas.openxmlformats.org/officeDocument/2006/relationships" xmlns:p1510="http://schemas.microsoft.com/office/powerpoint/2015/10/main">
-  <p1510:revLst>
-    <p1510:client id="{346ED42D-0595-794C-A353-7DDFAA2A4833}" v="102" dt="2026-04-29T08:28:31.564"/>
-  </p1510:revLst>
-</p1510:revInfo>
 </file>
 
 <file path=ppt/comments/modernComment_108_0.xml><?xml version="1.0" encoding="utf-8"?>
@@ -24184,17 +24176,15 @@
 <file path=ppt/slides/slide1.xml><?xml version="1.0" encoding="utf-8"?>
 <p:sld xmlns:a="http://schemas.openxmlformats.org/drawingml/2006/main" xmlns:r="http://schemas.openxmlformats.org/officeDocument/2006/relationships" xmlns:p="http://schemas.openxmlformats.org/presentationml/2006/main">
   <p:cSld>
-    <p:bg>
-      <p:bgPr>
-        <a:solidFill>
-          <a:schemeClr val="bg1"/>
-        </a:solidFill>
-        <a:effectLst/>
-      </p:bgPr>
-    </p:bg>
     <p:spTree>
       <p:nvGrpSpPr>
-        <p:cNvPr id="1" name=""/>
+        <p:cNvPr id="1" name="">
+          <a:extLst>
+            <a:ext uri="{FF2B5EF4-FFF2-40B4-BE49-F238E27FC236}">
+              <a16:creationId xmlns:a16="http://schemas.microsoft.com/office/drawing/2014/main" id="{15B76741-A75A-C65C-60CE-BD1857FA98CE}"/>
+            </a:ext>
+          </a:extLst>
+        </p:cNvPr>
         <p:cNvGrpSpPr/>
         <p:nvPr/>
       </p:nvGrpSpPr>
@@ -24206,69 +24196,15 @@
           <a:chExt cx="0" cy="0"/>
         </a:xfrm>
       </p:grpSpPr>
-      <p:sp useBgFill="1">
+      <p:sp>
         <p:nvSpPr>
-          <p:cNvPr id="61" name="Rectangle 60">
+          <p:cNvPr id="2" name="Title 1">
             <a:extLst>
               <a:ext uri="{FF2B5EF4-FFF2-40B4-BE49-F238E27FC236}">
-                <a16:creationId xmlns:a16="http://schemas.microsoft.com/office/drawing/2014/main" id="{F7EDEA10-087E-4352-A848-7D9888DC6745}"/>
-              </a:ext>
-              <a:ext uri="{C183D7F6-B498-43B3-948B-1728B52AA6E4}">
-                <adec:decorative xmlns:adec="http://schemas.microsoft.com/office/drawing/2017/decorative" val="1"/>
+                <a16:creationId xmlns:a16="http://schemas.microsoft.com/office/drawing/2014/main" id="{F351BCB4-964E-17A3-DF87-71BA389F0144}"/>
               </a:ext>
             </a:extLst>
           </p:cNvPr>
-          <p:cNvSpPr>
-            <a:spLocks noGrp="1" noRot="1" noChangeAspect="1" noMove="1" noResize="1" noEditPoints="1" noAdjustHandles="1" noChangeArrowheads="1" noChangeShapeType="1" noTextEdit="1"/>
-          </p:cNvSpPr>
-          <p:nvPr>
-            <p:extLst>
-              <p:ext uri="{386F3935-93C4-4BCD-93E2-E3B085C9AB24}">
-                <p16:designElem xmlns:p16="http://schemas.microsoft.com/office/powerpoint/2015/main" val="1"/>
-              </p:ext>
-            </p:extLst>
-          </p:nvPr>
-        </p:nvSpPr>
-        <p:spPr>
-          <a:xfrm>
-            <a:off x="0" y="0"/>
-            <a:ext cx="9141714" cy="6858000"/>
-          </a:xfrm>
-          <a:prstGeom prst="rect">
-            <a:avLst/>
-          </a:prstGeom>
-          <a:ln>
-            <a:noFill/>
-          </a:ln>
-        </p:spPr>
-        <p:style>
-          <a:lnRef idx="2">
-            <a:schemeClr val="accent1">
-              <a:shade val="50000"/>
-            </a:schemeClr>
-          </a:lnRef>
-          <a:fillRef idx="1">
-            <a:schemeClr val="accent1"/>
-          </a:fillRef>
-          <a:effectRef idx="0">
-            <a:schemeClr val="accent1"/>
-          </a:effectRef>
-          <a:fontRef idx="minor">
-            <a:schemeClr val="lt1"/>
-          </a:fontRef>
-        </p:style>
-        <p:txBody>
-          <a:bodyPr rtlCol="0" anchor="ctr"/>
-          <a:lstStyle/>
-          <a:p>
-            <a:pPr algn="ctr"/>
-            <a:endParaRPr lang="en-US"/>
-          </a:p>
-        </p:txBody>
-      </p:sp>
-      <p:sp>
-        <p:nvSpPr>
-          <p:cNvPr id="2" name="Title 1"/>
           <p:cNvSpPr>
             <a:spLocks noGrp="1"/>
           </p:cNvSpPr>
@@ -24278,31 +24214,47 @@
         </p:nvSpPr>
         <p:spPr>
           <a:xfrm>
-            <a:off x="628650" y="4242090"/>
-            <a:ext cx="7886700" cy="1270232"/>
+            <a:off x="313178" y="5683980"/>
+            <a:ext cx="7944130" cy="1000655"/>
           </a:xfrm>
         </p:spPr>
         <p:txBody>
-          <a:bodyPr>
+          <a:bodyPr anchor="t">
             <a:normAutofit/>
           </a:bodyPr>
           <a:lstStyle/>
           <a:p>
+            <a:pPr algn="l"/>
             <a:r>
-              <a:rPr lang="en-GB" sz="5700">
+              <a:rPr lang="en-GB" dirty="0" err="1">
+                <a:solidFill>
+                  <a:schemeClr val="tx2"/>
+                </a:solidFill>
                 <a:latin typeface="Baskerville Old Face" panose="02020602080505020303" pitchFamily="18" charset="77"/>
               </a:rPr>
-              <a:t>Classificazione Wine</a:t>
+              <a:t>Classificazione</a:t>
             </a:r>
-            <a:endParaRPr lang="en-GB" sz="5700" dirty="0">
-              <a:latin typeface="Baskerville Old Face" panose="02020602080505020303" pitchFamily="18" charset="77"/>
-            </a:endParaRPr>
+            <a:r>
+              <a:rPr lang="en-GB" dirty="0">
+                <a:solidFill>
+                  <a:schemeClr val="tx2"/>
+                </a:solidFill>
+                <a:latin typeface="Baskerville Old Face" panose="02020602080505020303" pitchFamily="18" charset="77"/>
+              </a:rPr>
+              <a:t> Wine</a:t>
+            </a:r>
           </a:p>
         </p:txBody>
       </p:sp>
       <p:sp>
         <p:nvSpPr>
-          <p:cNvPr id="3" name="Subtitle 2"/>
+          <p:cNvPr id="3" name="Subtitle 2">
+            <a:extLst>
+              <a:ext uri="{FF2B5EF4-FFF2-40B4-BE49-F238E27FC236}">
+                <a16:creationId xmlns:a16="http://schemas.microsoft.com/office/drawing/2014/main" id="{E9DA55CF-3576-D5B4-E984-3F6B7375D8F1}"/>
+              </a:ext>
+            </a:extLst>
+          </p:cNvPr>
           <p:cNvSpPr>
             <a:spLocks noGrp="1"/>
           </p:cNvSpPr>
@@ -24312,1157 +24264,134 @@
         </p:nvSpPr>
         <p:spPr>
           <a:xfrm>
-            <a:off x="628650" y="5604397"/>
-            <a:ext cx="7886700" cy="647468"/>
+            <a:off x="313178" y="5441793"/>
+            <a:ext cx="7062673" cy="484374"/>
           </a:xfrm>
         </p:spPr>
         <p:txBody>
-          <a:bodyPr>
+          <a:bodyPr anchor="b">
             <a:normAutofit/>
           </a:bodyPr>
           <a:lstStyle/>
           <a:p>
-            <a:pPr>
-              <a:lnSpc>
-                <a:spcPct val="90000"/>
-              </a:lnSpc>
-            </a:pPr>
+            <a:pPr algn="l"/>
             <a:r>
-              <a:rPr lang="en-GB" sz="2200"/>
-              <a:t>Repo: https://github.com/klausssssssssssssss/Classificazione_wine</a:t>
+              <a:rPr lang="en-GB" sz="1700" dirty="0">
+                <a:solidFill>
+                  <a:schemeClr val="tx2"/>
+                </a:solidFill>
+              </a:rPr>
+              <a:t>Repo: https://</a:t>
             </a:r>
+            <a:r>
+              <a:rPr lang="en-GB" sz="1700" dirty="0" err="1">
+                <a:solidFill>
+                  <a:schemeClr val="tx2"/>
+                </a:solidFill>
+              </a:rPr>
+              <a:t>github.com</a:t>
+            </a:r>
+            <a:r>
+              <a:rPr lang="en-GB" sz="1700" dirty="0">
+                <a:solidFill>
+                  <a:schemeClr val="tx2"/>
+                </a:solidFill>
+              </a:rPr>
+              <a:t>/</a:t>
+            </a:r>
+            <a:r>
+              <a:rPr lang="en-GB" sz="1700" dirty="0" err="1">
+                <a:solidFill>
+                  <a:schemeClr val="tx2"/>
+                </a:solidFill>
+              </a:rPr>
+              <a:t>klausssssssssssssss</a:t>
+            </a:r>
+            <a:r>
+              <a:rPr lang="en-GB" sz="1700" dirty="0">
+                <a:solidFill>
+                  <a:schemeClr val="tx2"/>
+                </a:solidFill>
+              </a:rPr>
+              <a:t>/</a:t>
+            </a:r>
+            <a:r>
+              <a:rPr lang="en-GB" sz="1700" dirty="0" err="1">
+                <a:solidFill>
+                  <a:schemeClr val="tx2"/>
+                </a:solidFill>
+              </a:rPr>
+              <a:t>Classificazione_wine</a:t>
+            </a:r>
+            <a:endParaRPr lang="en-GB" sz="1700" dirty="0">
+              <a:solidFill>
+                <a:schemeClr val="tx2"/>
+              </a:solidFill>
+            </a:endParaRPr>
           </a:p>
           <a:p>
-            <a:pPr>
-              <a:lnSpc>
-                <a:spcPct val="90000"/>
-              </a:lnSpc>
-            </a:pPr>
-            <a:endParaRPr lang="en-GB" sz="2200" dirty="0"/>
+            <a:pPr algn="l"/>
+            <a:endParaRPr lang="en-GB" sz="1700" dirty="0">
+              <a:solidFill>
+                <a:schemeClr val="tx2"/>
+              </a:solidFill>
+            </a:endParaRPr>
           </a:p>
         </p:txBody>
       </p:sp>
       <p:pic>
         <p:nvPicPr>
-          <p:cNvPr id="8" name="Picture 7">
+          <p:cNvPr id="2052" name="Picture 4" descr="Common Types of Wine (Top Varieties to Know) | Wine Folly">
             <a:extLst>
               <a:ext uri="{FF2B5EF4-FFF2-40B4-BE49-F238E27FC236}">
-                <a16:creationId xmlns:a16="http://schemas.microsoft.com/office/drawing/2014/main" id="{DEA59E64-2467-D065-D54C-7CF8A84FED08}"/>
+                <a16:creationId xmlns:a16="http://schemas.microsoft.com/office/drawing/2014/main" id="{B2A8306B-72FA-6300-3E67-129EC95C4326}"/>
               </a:ext>
             </a:extLst>
           </p:cNvPr>
           <p:cNvPicPr>
-            <a:picLocks noChangeAspect="1"/>
+            <a:picLocks noChangeAspect="1" noChangeArrowheads="1"/>
           </p:cNvPicPr>
           <p:nvPr/>
         </p:nvPicPr>
-        <p:blipFill>
-          <a:blip r:embed="rId2"/>
-          <a:srcRect l="13691" r="13824" b="-4"/>
+        <p:blipFill rotWithShape="1">
+          <a:blip r:embed="rId2">
+            <a:extLst>
+              <a:ext uri="{28A0092B-C50C-407E-A947-70E740481C1C}">
+                <a14:useLocalDpi xmlns:a14="http://schemas.microsoft.com/office/drawing/2010/main" val="0"/>
+              </a:ext>
+            </a:extLst>
+          </a:blip>
+          <a:srcRect t="2" b="6563"/>
           <a:stretch>
             <a:fillRect/>
           </a:stretch>
         </p:blipFill>
-        <p:spPr>
+        <p:spPr bwMode="auto">
           <a:xfrm>
-            <a:off x="382773" y="400051"/>
-            <a:ext cx="2643666" cy="3647338"/>
+            <a:off x="-3" y="0"/>
+            <a:ext cx="9144003" cy="5119026"/>
           </a:xfrm>
-          <a:custGeom>
+          <a:prstGeom prst="rect">
             <a:avLst/>
-            <a:gdLst/>
-            <a:ahLst/>
-            <a:cxnLst/>
-            <a:rect l="l" t="t" r="r" b="b"/>
-            <a:pathLst>
-              <a:path w="3524888" h="3647338">
-                <a:moveTo>
-                  <a:pt x="887180" y="60"/>
-                </a:moveTo>
-                <a:cubicBezTo>
-                  <a:pt x="945946" y="-443"/>
-                  <a:pt x="1004682" y="2214"/>
-                  <a:pt x="1063120" y="9535"/>
-                </a:cubicBezTo>
-                <a:cubicBezTo>
-                  <a:pt x="1192553" y="25206"/>
-                  <a:pt x="1324035" y="29312"/>
-                  <a:pt x="1454772" y="21769"/>
-                </a:cubicBezTo>
-                <a:cubicBezTo>
-                  <a:pt x="1583729" y="15160"/>
-                  <a:pt x="1712924" y="14714"/>
-                  <a:pt x="1842239" y="16589"/>
-                </a:cubicBezTo>
-                <a:cubicBezTo>
-                  <a:pt x="1958874" y="18285"/>
-                  <a:pt x="2075629" y="18018"/>
-                  <a:pt x="2192264" y="13196"/>
-                </a:cubicBezTo>
-                <a:cubicBezTo>
-                  <a:pt x="2323253" y="7660"/>
-                  <a:pt x="2454242" y="2928"/>
-                  <a:pt x="2585114" y="13911"/>
-                </a:cubicBezTo>
-                <a:cubicBezTo>
-                  <a:pt x="2699008" y="24482"/>
-                  <a:pt x="2813668" y="29758"/>
-                  <a:pt x="2928437" y="29714"/>
-                </a:cubicBezTo>
-                <a:cubicBezTo>
-                  <a:pt x="3080601" y="28464"/>
-                  <a:pt x="3232406" y="19625"/>
-                  <a:pt x="3384330" y="14536"/>
-                </a:cubicBezTo>
-                <a:lnTo>
-                  <a:pt x="3481468" y="12130"/>
-                </a:lnTo>
-                <a:lnTo>
-                  <a:pt x="3481325" y="16098"/>
-                </a:lnTo>
-                <a:lnTo>
-                  <a:pt x="3493308" y="84630"/>
-                </a:lnTo>
-                <a:lnTo>
-                  <a:pt x="3493318" y="92959"/>
-                </a:lnTo>
-                <a:cubicBezTo>
-                  <a:pt x="3495695" y="161085"/>
-                  <a:pt x="3501168" y="229143"/>
-                  <a:pt x="3512114" y="297090"/>
-                </a:cubicBezTo>
-                <a:cubicBezTo>
-                  <a:pt x="3519231" y="340796"/>
-                  <a:pt x="3524136" y="384681"/>
-                  <a:pt x="3524809" y="428543"/>
-                </a:cubicBezTo>
-                <a:cubicBezTo>
-                  <a:pt x="3525482" y="472405"/>
-                  <a:pt x="3521924" y="516245"/>
-                  <a:pt x="3512114" y="559861"/>
-                </a:cubicBezTo>
-                <a:cubicBezTo>
-                  <a:pt x="3491119" y="656469"/>
-                  <a:pt x="3485618" y="754605"/>
-                  <a:pt x="3495724" y="852186"/>
-                </a:cubicBezTo>
-                <a:cubicBezTo>
-                  <a:pt x="3504578" y="948437"/>
-                  <a:pt x="3505176" y="1044867"/>
-                  <a:pt x="3502664" y="1141386"/>
-                </a:cubicBezTo>
-                <a:cubicBezTo>
-                  <a:pt x="3500391" y="1228440"/>
-                  <a:pt x="3500750" y="1315584"/>
-                  <a:pt x="3507210" y="1402639"/>
-                </a:cubicBezTo>
-                <a:cubicBezTo>
-                  <a:pt x="3514626" y="1500407"/>
-                  <a:pt x="3520966" y="1598176"/>
-                  <a:pt x="3506252" y="1695856"/>
-                </a:cubicBezTo>
-                <a:cubicBezTo>
-                  <a:pt x="3492089" y="1780866"/>
-                  <a:pt x="3485019" y="1866447"/>
-                  <a:pt x="3485079" y="1952109"/>
-                </a:cubicBezTo>
-                <a:cubicBezTo>
-                  <a:pt x="3486753" y="2065682"/>
-                  <a:pt x="3498595" y="2178986"/>
-                  <a:pt x="3505415" y="2292381"/>
-                </a:cubicBezTo>
-                <a:cubicBezTo>
-                  <a:pt x="3514746" y="2447918"/>
-                  <a:pt x="3522761" y="2603544"/>
-                  <a:pt x="3508406" y="2759171"/>
-                </a:cubicBezTo>
-                <a:cubicBezTo>
-                  <a:pt x="3497997" y="2866762"/>
-                  <a:pt x="3488427" y="2974352"/>
-                  <a:pt x="3496442" y="3082389"/>
-                </a:cubicBezTo>
-                <a:cubicBezTo>
-                  <a:pt x="3502066" y="3158639"/>
-                  <a:pt x="3510200" y="3234980"/>
-                  <a:pt x="3504816" y="3311409"/>
-                </a:cubicBezTo>
-                <a:lnTo>
-                  <a:pt x="3500655" y="3407763"/>
-                </a:lnTo>
-                <a:lnTo>
-                  <a:pt x="3500528" y="3407763"/>
-                </a:lnTo>
-                <a:lnTo>
-                  <a:pt x="3500186" y="3418624"/>
-                </a:lnTo>
-                <a:lnTo>
-                  <a:pt x="3498431" y="3459279"/>
-                </a:lnTo>
-                <a:lnTo>
-                  <a:pt x="3498786" y="3476530"/>
-                </a:lnTo>
-                <a:lnTo>
-                  <a:pt x="3500070" y="3476530"/>
-                </a:lnTo>
-                <a:lnTo>
-                  <a:pt x="3504922" y="3592711"/>
-                </a:lnTo>
-                <a:lnTo>
-                  <a:pt x="3504733" y="3642505"/>
-                </a:lnTo>
-                <a:lnTo>
-                  <a:pt x="3344090" y="3645620"/>
-                </a:lnTo>
-                <a:cubicBezTo>
-                  <a:pt x="3179267" y="3652578"/>
-                  <a:pt x="3015642" y="3636699"/>
-                  <a:pt x="2851776" y="3628492"/>
-                </a:cubicBezTo>
-                <a:cubicBezTo>
-                  <a:pt x="2716167" y="3622675"/>
-                  <a:pt x="2580186" y="3623335"/>
-                  <a:pt x="2444683" y="3630454"/>
-                </a:cubicBezTo>
-                <a:cubicBezTo>
-                  <a:pt x="2220221" y="3640802"/>
-                  <a:pt x="1995758" y="3642229"/>
-                  <a:pt x="1771055" y="3636431"/>
-                </a:cubicBezTo>
-                <a:cubicBezTo>
-                  <a:pt x="1659183" y="3633576"/>
-                  <a:pt x="1547429" y="3634736"/>
-                  <a:pt x="1435675" y="3638305"/>
-                </a:cubicBezTo>
-                <a:cubicBezTo>
-                  <a:pt x="1179420" y="3646601"/>
-                  <a:pt x="923403" y="3637323"/>
-                  <a:pt x="667265" y="3634558"/>
-                </a:cubicBezTo>
-                <a:cubicBezTo>
-                  <a:pt x="569736" y="3633488"/>
-                  <a:pt x="472205" y="3633665"/>
-                  <a:pt x="374794" y="3637679"/>
-                </a:cubicBezTo>
-                <a:cubicBezTo>
-                  <a:pt x="264415" y="3642140"/>
-                  <a:pt x="154036" y="3643412"/>
-                  <a:pt x="43657" y="3642932"/>
-                </a:cubicBezTo>
-                <a:lnTo>
-                  <a:pt x="11965" y="3642429"/>
-                </a:lnTo>
-                <a:lnTo>
-                  <a:pt x="24360" y="3479541"/>
-                </a:lnTo>
-                <a:cubicBezTo>
-                  <a:pt x="26194" y="3423392"/>
-                  <a:pt x="25594" y="3367189"/>
-                  <a:pt x="22559" y="3311038"/>
-                </a:cubicBezTo>
-                <a:cubicBezTo>
-                  <a:pt x="16343" y="3197955"/>
-                  <a:pt x="-628" y="3084971"/>
-                  <a:pt x="13594" y="2971689"/>
-                </a:cubicBezTo>
-                <a:cubicBezTo>
-                  <a:pt x="38335" y="2776712"/>
-                  <a:pt x="12519" y="2582431"/>
-                  <a:pt x="4272" y="2387950"/>
-                </a:cubicBezTo>
-                <a:cubicBezTo>
-                  <a:pt x="-3262" y="2237604"/>
-                  <a:pt x="2250" y="2086990"/>
-                  <a:pt x="20765" y="1937298"/>
-                </a:cubicBezTo>
-                <a:cubicBezTo>
-                  <a:pt x="38958" y="1790576"/>
-                  <a:pt x="37113" y="1642627"/>
-                  <a:pt x="15268" y="1496252"/>
-                </a:cubicBezTo>
-                <a:cubicBezTo>
-                  <a:pt x="7718" y="1430798"/>
-                  <a:pt x="7400" y="1364898"/>
-                  <a:pt x="14311" y="1299395"/>
-                </a:cubicBezTo>
-                <a:cubicBezTo>
-                  <a:pt x="22640" y="1195064"/>
-                  <a:pt x="20682" y="1090348"/>
-                  <a:pt x="8455" y="986285"/>
-                </a:cubicBezTo>
-                <a:cubicBezTo>
-                  <a:pt x="-8159" y="849535"/>
-                  <a:pt x="3794" y="712390"/>
-                  <a:pt x="9890" y="575539"/>
-                </a:cubicBezTo>
-                <a:cubicBezTo>
-                  <a:pt x="14432" y="472556"/>
-                  <a:pt x="17180" y="369671"/>
-                  <a:pt x="12878" y="266688"/>
-                </a:cubicBezTo>
-                <a:lnTo>
-                  <a:pt x="14418" y="21931"/>
-                </a:lnTo>
-                <a:lnTo>
-                  <a:pt x="163536" y="23733"/>
-                </a:lnTo>
-                <a:cubicBezTo>
-                  <a:pt x="346324" y="25875"/>
-                  <a:pt x="528992" y="25875"/>
-                  <a:pt x="711062" y="9535"/>
-                </a:cubicBezTo>
-                <a:cubicBezTo>
-                  <a:pt x="769619" y="4223"/>
-                  <a:pt x="828415" y="562"/>
-                  <a:pt x="887180" y="60"/>
-                </a:cubicBezTo>
-                <a:close/>
-              </a:path>
-            </a:pathLst>
-          </a:custGeom>
+          </a:prstGeom>
+          <a:noFill/>
+          <a:extLst>
+            <a:ext uri="{909E8E84-426E-40DD-AFC4-6F175D3DCCD1}">
+              <a14:hiddenFill xmlns:a14="http://schemas.microsoft.com/office/drawing/2010/main">
+                <a:solidFill>
+                  <a:srgbClr val="FFFFFF"/>
+                </a:solidFill>
+              </a14:hiddenFill>
+            </a:ext>
+          </a:extLst>
         </p:spPr>
       </p:pic>
-      <p:pic>
-        <p:nvPicPr>
-          <p:cNvPr id="11" name="Picture 10">
-            <a:extLst>
-              <a:ext uri="{FF2B5EF4-FFF2-40B4-BE49-F238E27FC236}">
-                <a16:creationId xmlns:a16="http://schemas.microsoft.com/office/drawing/2014/main" id="{7CECF5A0-C4D9-7865-7A49-D84F12B18E09}"/>
-              </a:ext>
-            </a:extLst>
-          </p:cNvPr>
-          <p:cNvPicPr>
-            <a:picLocks noChangeAspect="1"/>
-          </p:cNvPicPr>
-          <p:nvPr/>
-        </p:nvPicPr>
-        <p:blipFill>
-          <a:blip r:embed="rId3"/>
-          <a:srcRect l="29692" r="29356" b="2"/>
-          <a:stretch>
-            <a:fillRect/>
-          </a:stretch>
-        </p:blipFill>
-        <p:spPr>
-          <a:xfrm>
-            <a:off x="3546763" y="400051"/>
-            <a:ext cx="2190309" cy="3647338"/>
-          </a:xfrm>
-          <a:custGeom>
-            <a:avLst/>
-            <a:gdLst/>
-            <a:ahLst/>
-            <a:cxnLst/>
-            <a:rect l="l" t="t" r="r" b="b"/>
-            <a:pathLst>
-              <a:path w="3524888" h="3647338">
-                <a:moveTo>
-                  <a:pt x="887181" y="60"/>
-                </a:moveTo>
-                <a:cubicBezTo>
-                  <a:pt x="945947" y="-443"/>
-                  <a:pt x="1004683" y="2214"/>
-                  <a:pt x="1063120" y="9535"/>
-                </a:cubicBezTo>
-                <a:cubicBezTo>
-                  <a:pt x="1192553" y="25206"/>
-                  <a:pt x="1324035" y="29312"/>
-                  <a:pt x="1454772" y="21769"/>
-                </a:cubicBezTo>
-                <a:cubicBezTo>
-                  <a:pt x="1583729" y="15160"/>
-                  <a:pt x="1712924" y="14714"/>
-                  <a:pt x="1842239" y="16589"/>
-                </a:cubicBezTo>
-                <a:cubicBezTo>
-                  <a:pt x="1958874" y="18285"/>
-                  <a:pt x="2075629" y="18018"/>
-                  <a:pt x="2192264" y="13196"/>
-                </a:cubicBezTo>
-                <a:cubicBezTo>
-                  <a:pt x="2323253" y="7660"/>
-                  <a:pt x="2454242" y="2928"/>
-                  <a:pt x="2585114" y="13911"/>
-                </a:cubicBezTo>
-                <a:cubicBezTo>
-                  <a:pt x="2699008" y="24482"/>
-                  <a:pt x="2813669" y="29758"/>
-                  <a:pt x="2928437" y="29714"/>
-                </a:cubicBezTo>
-                <a:cubicBezTo>
-                  <a:pt x="3080601" y="28464"/>
-                  <a:pt x="3232406" y="19625"/>
-                  <a:pt x="3384330" y="14536"/>
-                </a:cubicBezTo>
-                <a:lnTo>
-                  <a:pt x="3481468" y="12130"/>
-                </a:lnTo>
-                <a:lnTo>
-                  <a:pt x="3481325" y="16098"/>
-                </a:lnTo>
-                <a:lnTo>
-                  <a:pt x="3493308" y="84630"/>
-                </a:lnTo>
-                <a:lnTo>
-                  <a:pt x="3493318" y="92959"/>
-                </a:lnTo>
-                <a:cubicBezTo>
-                  <a:pt x="3495695" y="161085"/>
-                  <a:pt x="3501169" y="229143"/>
-                  <a:pt x="3512114" y="297090"/>
-                </a:cubicBezTo>
-                <a:cubicBezTo>
-                  <a:pt x="3519231" y="340796"/>
-                  <a:pt x="3524136" y="384681"/>
-                  <a:pt x="3524809" y="428543"/>
-                </a:cubicBezTo>
-                <a:cubicBezTo>
-                  <a:pt x="3525482" y="472405"/>
-                  <a:pt x="3521924" y="516245"/>
-                  <a:pt x="3512114" y="559861"/>
-                </a:cubicBezTo>
-                <a:cubicBezTo>
-                  <a:pt x="3491119" y="656469"/>
-                  <a:pt x="3485618" y="754605"/>
-                  <a:pt x="3495724" y="852186"/>
-                </a:cubicBezTo>
-                <a:cubicBezTo>
-                  <a:pt x="3504578" y="948437"/>
-                  <a:pt x="3505176" y="1044867"/>
-                  <a:pt x="3502664" y="1141385"/>
-                </a:cubicBezTo>
-                <a:cubicBezTo>
-                  <a:pt x="3500391" y="1228440"/>
-                  <a:pt x="3500750" y="1315584"/>
-                  <a:pt x="3507210" y="1402639"/>
-                </a:cubicBezTo>
-                <a:cubicBezTo>
-                  <a:pt x="3514626" y="1500407"/>
-                  <a:pt x="3520966" y="1598176"/>
-                  <a:pt x="3506252" y="1695857"/>
-                </a:cubicBezTo>
-                <a:cubicBezTo>
-                  <a:pt x="3492089" y="1780866"/>
-                  <a:pt x="3485019" y="1866447"/>
-                  <a:pt x="3485079" y="1952109"/>
-                </a:cubicBezTo>
-                <a:cubicBezTo>
-                  <a:pt x="3486753" y="2065682"/>
-                  <a:pt x="3498596" y="2178986"/>
-                  <a:pt x="3505415" y="2292381"/>
-                </a:cubicBezTo>
-                <a:cubicBezTo>
-                  <a:pt x="3514746" y="2447918"/>
-                  <a:pt x="3522761" y="2603544"/>
-                  <a:pt x="3508406" y="2759171"/>
-                </a:cubicBezTo>
-                <a:cubicBezTo>
-                  <a:pt x="3497997" y="2866762"/>
-                  <a:pt x="3488428" y="2974352"/>
-                  <a:pt x="3496442" y="3082389"/>
-                </a:cubicBezTo>
-                <a:cubicBezTo>
-                  <a:pt x="3502066" y="3158639"/>
-                  <a:pt x="3510200" y="3234980"/>
-                  <a:pt x="3504816" y="3311409"/>
-                </a:cubicBezTo>
-                <a:lnTo>
-                  <a:pt x="3500655" y="3407763"/>
-                </a:lnTo>
-                <a:lnTo>
-                  <a:pt x="3500528" y="3407763"/>
-                </a:lnTo>
-                <a:lnTo>
-                  <a:pt x="3500186" y="3418624"/>
-                </a:lnTo>
-                <a:lnTo>
-                  <a:pt x="3498431" y="3459279"/>
-                </a:lnTo>
-                <a:lnTo>
-                  <a:pt x="3498786" y="3476530"/>
-                </a:lnTo>
-                <a:lnTo>
-                  <a:pt x="3500070" y="3476530"/>
-                </a:lnTo>
-                <a:lnTo>
-                  <a:pt x="3504922" y="3592711"/>
-                </a:lnTo>
-                <a:lnTo>
-                  <a:pt x="3504733" y="3642505"/>
-                </a:lnTo>
-                <a:lnTo>
-                  <a:pt x="3344090" y="3645620"/>
-                </a:lnTo>
-                <a:cubicBezTo>
-                  <a:pt x="3179268" y="3652578"/>
-                  <a:pt x="3015642" y="3636699"/>
-                  <a:pt x="2851776" y="3628492"/>
-                </a:cubicBezTo>
-                <a:cubicBezTo>
-                  <a:pt x="2716167" y="3622675"/>
-                  <a:pt x="2580186" y="3623335"/>
-                  <a:pt x="2444683" y="3630454"/>
-                </a:cubicBezTo>
-                <a:cubicBezTo>
-                  <a:pt x="2220221" y="3640802"/>
-                  <a:pt x="1995758" y="3642229"/>
-                  <a:pt x="1771055" y="3636431"/>
-                </a:cubicBezTo>
-                <a:cubicBezTo>
-                  <a:pt x="1659183" y="3633576"/>
-                  <a:pt x="1547429" y="3634736"/>
-                  <a:pt x="1435676" y="3638305"/>
-                </a:cubicBezTo>
-                <a:cubicBezTo>
-                  <a:pt x="1179420" y="3646601"/>
-                  <a:pt x="923403" y="3637323"/>
-                  <a:pt x="667265" y="3634558"/>
-                </a:cubicBezTo>
-                <a:cubicBezTo>
-                  <a:pt x="569736" y="3633488"/>
-                  <a:pt x="472205" y="3633665"/>
-                  <a:pt x="374794" y="3637679"/>
-                </a:cubicBezTo>
-                <a:cubicBezTo>
-                  <a:pt x="264415" y="3642140"/>
-                  <a:pt x="154036" y="3643412"/>
-                  <a:pt x="43657" y="3642932"/>
-                </a:cubicBezTo>
-                <a:lnTo>
-                  <a:pt x="11965" y="3642429"/>
-                </a:lnTo>
-                <a:lnTo>
-                  <a:pt x="24360" y="3479541"/>
-                </a:lnTo>
-                <a:cubicBezTo>
-                  <a:pt x="26194" y="3423392"/>
-                  <a:pt x="25594" y="3367189"/>
-                  <a:pt x="22559" y="3311038"/>
-                </a:cubicBezTo>
-                <a:cubicBezTo>
-                  <a:pt x="16343" y="3197955"/>
-                  <a:pt x="-628" y="3084971"/>
-                  <a:pt x="13594" y="2971689"/>
-                </a:cubicBezTo>
-                <a:cubicBezTo>
-                  <a:pt x="38335" y="2776712"/>
-                  <a:pt x="12519" y="2582431"/>
-                  <a:pt x="4272" y="2387950"/>
-                </a:cubicBezTo>
-                <a:cubicBezTo>
-                  <a:pt x="-3262" y="2237604"/>
-                  <a:pt x="2250" y="2086990"/>
-                  <a:pt x="20765" y="1937298"/>
-                </a:cubicBezTo>
-                <a:cubicBezTo>
-                  <a:pt x="38958" y="1790576"/>
-                  <a:pt x="37113" y="1642627"/>
-                  <a:pt x="15268" y="1496252"/>
-                </a:cubicBezTo>
-                <a:cubicBezTo>
-                  <a:pt x="7718" y="1430798"/>
-                  <a:pt x="7400" y="1364898"/>
-                  <a:pt x="14311" y="1299395"/>
-                </a:cubicBezTo>
-                <a:cubicBezTo>
-                  <a:pt x="22640" y="1195064"/>
-                  <a:pt x="20682" y="1090348"/>
-                  <a:pt x="8455" y="986285"/>
-                </a:cubicBezTo>
-                <a:cubicBezTo>
-                  <a:pt x="-8159" y="849535"/>
-                  <a:pt x="3794" y="712390"/>
-                  <a:pt x="9890" y="575539"/>
-                </a:cubicBezTo>
-                <a:cubicBezTo>
-                  <a:pt x="14432" y="472556"/>
-                  <a:pt x="17180" y="369671"/>
-                  <a:pt x="12878" y="266688"/>
-                </a:cubicBezTo>
-                <a:lnTo>
-                  <a:pt x="14418" y="21931"/>
-                </a:lnTo>
-                <a:lnTo>
-                  <a:pt x="163536" y="23733"/>
-                </a:lnTo>
-                <a:cubicBezTo>
-                  <a:pt x="346324" y="25875"/>
-                  <a:pt x="528992" y="25875"/>
-                  <a:pt x="711062" y="9535"/>
-                </a:cubicBezTo>
-                <a:cubicBezTo>
-                  <a:pt x="769619" y="4223"/>
-                  <a:pt x="828415" y="562"/>
-                  <a:pt x="887181" y="60"/>
-                </a:cubicBezTo>
-                <a:close/>
-              </a:path>
-            </a:pathLst>
-          </a:custGeom>
-        </p:spPr>
-      </p:pic>
-      <p:pic>
-        <p:nvPicPr>
-          <p:cNvPr id="5" name="Picture 4">
-            <a:extLst>
-              <a:ext uri="{FF2B5EF4-FFF2-40B4-BE49-F238E27FC236}">
-                <a16:creationId xmlns:a16="http://schemas.microsoft.com/office/drawing/2014/main" id="{D5B6F3E0-7C5C-0ECA-C1F2-9C52005627C5}"/>
-              </a:ext>
-            </a:extLst>
-          </p:cNvPr>
-          <p:cNvPicPr>
-            <a:picLocks noChangeAspect="1"/>
-          </p:cNvPicPr>
-          <p:nvPr/>
-        </p:nvPicPr>
-        <p:blipFill>
-          <a:blip r:embed="rId4"/>
-          <a:srcRect l="13341" r="14174" b="-4"/>
-          <a:stretch>
-            <a:fillRect/>
-          </a:stretch>
-        </p:blipFill>
-        <p:spPr>
-          <a:xfrm>
-            <a:off x="6117560" y="400052"/>
-            <a:ext cx="2643666" cy="3647338"/>
-          </a:xfrm>
-          <a:custGeom>
-            <a:avLst/>
-            <a:gdLst/>
-            <a:ahLst/>
-            <a:cxnLst/>
-            <a:rect l="l" t="t" r="r" b="b"/>
-            <a:pathLst>
-              <a:path w="3524888" h="3647338">
-                <a:moveTo>
-                  <a:pt x="887180" y="60"/>
-                </a:moveTo>
-                <a:cubicBezTo>
-                  <a:pt x="945946" y="-443"/>
-                  <a:pt x="1004683" y="2214"/>
-                  <a:pt x="1063120" y="9535"/>
-                </a:cubicBezTo>
-                <a:cubicBezTo>
-                  <a:pt x="1192553" y="25206"/>
-                  <a:pt x="1324035" y="29312"/>
-                  <a:pt x="1454772" y="21769"/>
-                </a:cubicBezTo>
-                <a:cubicBezTo>
-                  <a:pt x="1583729" y="15160"/>
-                  <a:pt x="1712924" y="14714"/>
-                  <a:pt x="1842239" y="16589"/>
-                </a:cubicBezTo>
-                <a:cubicBezTo>
-                  <a:pt x="1958874" y="18285"/>
-                  <a:pt x="2075628" y="18018"/>
-                  <a:pt x="2192263" y="13196"/>
-                </a:cubicBezTo>
-                <a:cubicBezTo>
-                  <a:pt x="2323253" y="7660"/>
-                  <a:pt x="2454242" y="2928"/>
-                  <a:pt x="2585113" y="13911"/>
-                </a:cubicBezTo>
-                <a:cubicBezTo>
-                  <a:pt x="2699008" y="24482"/>
-                  <a:pt x="2813668" y="29758"/>
-                  <a:pt x="2928437" y="29714"/>
-                </a:cubicBezTo>
-                <a:cubicBezTo>
-                  <a:pt x="3080601" y="28464"/>
-                  <a:pt x="3232406" y="19625"/>
-                  <a:pt x="3384330" y="14536"/>
-                </a:cubicBezTo>
-                <a:lnTo>
-                  <a:pt x="3481468" y="12130"/>
-                </a:lnTo>
-                <a:lnTo>
-                  <a:pt x="3481325" y="16098"/>
-                </a:lnTo>
-                <a:lnTo>
-                  <a:pt x="3493308" y="84630"/>
-                </a:lnTo>
-                <a:lnTo>
-                  <a:pt x="3493318" y="92959"/>
-                </a:lnTo>
-                <a:cubicBezTo>
-                  <a:pt x="3495694" y="161085"/>
-                  <a:pt x="3501168" y="229143"/>
-                  <a:pt x="3512114" y="297090"/>
-                </a:cubicBezTo>
-                <a:cubicBezTo>
-                  <a:pt x="3519231" y="340796"/>
-                  <a:pt x="3524136" y="384681"/>
-                  <a:pt x="3524809" y="428543"/>
-                </a:cubicBezTo>
-                <a:cubicBezTo>
-                  <a:pt x="3525482" y="472405"/>
-                  <a:pt x="3521923" y="516245"/>
-                  <a:pt x="3512114" y="559861"/>
-                </a:cubicBezTo>
-                <a:cubicBezTo>
-                  <a:pt x="3491119" y="656469"/>
-                  <a:pt x="3485617" y="754605"/>
-                  <a:pt x="3495724" y="852186"/>
-                </a:cubicBezTo>
-                <a:cubicBezTo>
-                  <a:pt x="3504577" y="948437"/>
-                  <a:pt x="3505176" y="1044867"/>
-                  <a:pt x="3502664" y="1141386"/>
-                </a:cubicBezTo>
-                <a:cubicBezTo>
-                  <a:pt x="3500391" y="1228440"/>
-                  <a:pt x="3500749" y="1315584"/>
-                  <a:pt x="3507210" y="1402639"/>
-                </a:cubicBezTo>
-                <a:cubicBezTo>
-                  <a:pt x="3514626" y="1500407"/>
-                  <a:pt x="3520966" y="1598176"/>
-                  <a:pt x="3506251" y="1695856"/>
-                </a:cubicBezTo>
-                <a:cubicBezTo>
-                  <a:pt x="3492089" y="1780866"/>
-                  <a:pt x="3485019" y="1866447"/>
-                  <a:pt x="3485079" y="1952109"/>
-                </a:cubicBezTo>
-                <a:cubicBezTo>
-                  <a:pt x="3486753" y="2065682"/>
-                  <a:pt x="3498595" y="2178986"/>
-                  <a:pt x="3505414" y="2292381"/>
-                </a:cubicBezTo>
-                <a:cubicBezTo>
-                  <a:pt x="3514746" y="2447918"/>
-                  <a:pt x="3522760" y="2603544"/>
-                  <a:pt x="3508405" y="2759171"/>
-                </a:cubicBezTo>
-                <a:cubicBezTo>
-                  <a:pt x="3497997" y="2866762"/>
-                  <a:pt x="3488427" y="2974352"/>
-                  <a:pt x="3496442" y="3082389"/>
-                </a:cubicBezTo>
-                <a:cubicBezTo>
-                  <a:pt x="3502065" y="3158639"/>
-                  <a:pt x="3510200" y="3234980"/>
-                  <a:pt x="3504816" y="3311409"/>
-                </a:cubicBezTo>
-                <a:lnTo>
-                  <a:pt x="3500655" y="3407763"/>
-                </a:lnTo>
-                <a:lnTo>
-                  <a:pt x="3500528" y="3407763"/>
-                </a:lnTo>
-                <a:lnTo>
-                  <a:pt x="3500186" y="3418624"/>
-                </a:lnTo>
-                <a:lnTo>
-                  <a:pt x="3498431" y="3459279"/>
-                </a:lnTo>
-                <a:lnTo>
-                  <a:pt x="3498786" y="3476530"/>
-                </a:lnTo>
-                <a:lnTo>
-                  <a:pt x="3500070" y="3476530"/>
-                </a:lnTo>
-                <a:lnTo>
-                  <a:pt x="3504922" y="3592711"/>
-                </a:lnTo>
-                <a:lnTo>
-                  <a:pt x="3504733" y="3642505"/>
-                </a:lnTo>
-                <a:lnTo>
-                  <a:pt x="3344090" y="3645620"/>
-                </a:lnTo>
-                <a:cubicBezTo>
-                  <a:pt x="3179267" y="3652578"/>
-                  <a:pt x="3015642" y="3636699"/>
-                  <a:pt x="2851776" y="3628492"/>
-                </a:cubicBezTo>
-                <a:cubicBezTo>
-                  <a:pt x="2716167" y="3622675"/>
-                  <a:pt x="2580186" y="3623335"/>
-                  <a:pt x="2444683" y="3630454"/>
-                </a:cubicBezTo>
-                <a:cubicBezTo>
-                  <a:pt x="2220221" y="3640802"/>
-                  <a:pt x="1995757" y="3642229"/>
-                  <a:pt x="1771055" y="3636431"/>
-                </a:cubicBezTo>
-                <a:cubicBezTo>
-                  <a:pt x="1659183" y="3633576"/>
-                  <a:pt x="1547429" y="3634736"/>
-                  <a:pt x="1435675" y="3638305"/>
-                </a:cubicBezTo>
-                <a:cubicBezTo>
-                  <a:pt x="1179419" y="3646601"/>
-                  <a:pt x="923403" y="3637323"/>
-                  <a:pt x="667265" y="3634558"/>
-                </a:cubicBezTo>
-                <a:cubicBezTo>
-                  <a:pt x="569736" y="3633488"/>
-                  <a:pt x="472205" y="3633665"/>
-                  <a:pt x="374793" y="3637679"/>
-                </a:cubicBezTo>
-                <a:cubicBezTo>
-                  <a:pt x="264415" y="3642140"/>
-                  <a:pt x="154036" y="3643412"/>
-                  <a:pt x="43657" y="3642932"/>
-                </a:cubicBezTo>
-                <a:lnTo>
-                  <a:pt x="11965" y="3642429"/>
-                </a:lnTo>
-                <a:lnTo>
-                  <a:pt x="24360" y="3479541"/>
-                </a:lnTo>
-                <a:cubicBezTo>
-                  <a:pt x="26194" y="3423392"/>
-                  <a:pt x="25594" y="3367189"/>
-                  <a:pt x="22559" y="3311038"/>
-                </a:cubicBezTo>
-                <a:cubicBezTo>
-                  <a:pt x="16343" y="3197955"/>
-                  <a:pt x="-628" y="3084971"/>
-                  <a:pt x="13594" y="2971689"/>
-                </a:cubicBezTo>
-                <a:cubicBezTo>
-                  <a:pt x="38335" y="2776712"/>
-                  <a:pt x="12519" y="2582431"/>
-                  <a:pt x="4272" y="2387950"/>
-                </a:cubicBezTo>
-                <a:cubicBezTo>
-                  <a:pt x="-3262" y="2237604"/>
-                  <a:pt x="2250" y="2086990"/>
-                  <a:pt x="20765" y="1937298"/>
-                </a:cubicBezTo>
-                <a:cubicBezTo>
-                  <a:pt x="38958" y="1790576"/>
-                  <a:pt x="37113" y="1642627"/>
-                  <a:pt x="15268" y="1496252"/>
-                </a:cubicBezTo>
-                <a:cubicBezTo>
-                  <a:pt x="7718" y="1430798"/>
-                  <a:pt x="7400" y="1364898"/>
-                  <a:pt x="14311" y="1299395"/>
-                </a:cubicBezTo>
-                <a:cubicBezTo>
-                  <a:pt x="22640" y="1195064"/>
-                  <a:pt x="20682" y="1090348"/>
-                  <a:pt x="8455" y="986285"/>
-                </a:cubicBezTo>
-                <a:cubicBezTo>
-                  <a:pt x="-8159" y="849535"/>
-                  <a:pt x="3794" y="712390"/>
-                  <a:pt x="9890" y="575539"/>
-                </a:cubicBezTo>
-                <a:cubicBezTo>
-                  <a:pt x="14432" y="472556"/>
-                  <a:pt x="17180" y="369671"/>
-                  <a:pt x="12878" y="266688"/>
-                </a:cubicBezTo>
-                <a:lnTo>
-                  <a:pt x="14418" y="21931"/>
-                </a:lnTo>
-                <a:lnTo>
-                  <a:pt x="163536" y="23733"/>
-                </a:lnTo>
-                <a:cubicBezTo>
-                  <a:pt x="346324" y="25875"/>
-                  <a:pt x="528992" y="25875"/>
-                  <a:pt x="711061" y="9535"/>
-                </a:cubicBezTo>
-                <a:cubicBezTo>
-                  <a:pt x="769618" y="4223"/>
-                  <a:pt x="828414" y="562"/>
-                  <a:pt x="887180" y="60"/>
-                </a:cubicBezTo>
-                <a:close/>
-              </a:path>
-            </a:pathLst>
-          </a:custGeom>
-        </p:spPr>
-      </p:pic>
-      <p:sp>
-        <p:nvSpPr>
-          <p:cNvPr id="63" name="sketch line">
-            <a:extLst>
-              <a:ext uri="{FF2B5EF4-FFF2-40B4-BE49-F238E27FC236}">
-                <a16:creationId xmlns:a16="http://schemas.microsoft.com/office/drawing/2014/main" id="{605D77EC-B84E-48F8-9EC4-93E851C0FA25}"/>
-              </a:ext>
-              <a:ext uri="{C183D7F6-B498-43B3-948B-1728B52AA6E4}">
-                <adec:decorative xmlns:adec="http://schemas.microsoft.com/office/drawing/2017/decorative" val="1"/>
-              </a:ext>
-            </a:extLst>
-          </p:cNvPr>
-          <p:cNvSpPr>
-            <a:spLocks noGrp="1" noRot="1" noChangeAspect="1" noMove="1" noResize="1" noEditPoints="1" noAdjustHandles="1" noChangeArrowheads="1" noChangeShapeType="1" noTextEdit="1"/>
-          </p:cNvSpPr>
-          <p:nvPr>
-            <p:extLst>
-              <p:ext uri="{386F3935-93C4-4BCD-93E2-E3B085C9AB24}">
-                <p16:designElem xmlns:p16="http://schemas.microsoft.com/office/powerpoint/2015/main" val="1"/>
-              </p:ext>
-            </p:extLst>
-          </p:nvPr>
-        </p:nvSpPr>
-        <p:spPr>
-          <a:xfrm>
-            <a:off x="2979511" y="5512322"/>
-            <a:ext cx="3182692" cy="18288"/>
-          </a:xfrm>
-          <a:custGeom>
-            <a:avLst/>
-            <a:gdLst>
-              <a:gd name="csX0" fmla="*/ 0 w 3182692"/>
-              <a:gd name="csY0" fmla="*/ 0 h 18288"/>
-              <a:gd name="csX1" fmla="*/ 636538 w 3182692"/>
-              <a:gd name="csY1" fmla="*/ 0 h 18288"/>
-              <a:gd name="csX2" fmla="*/ 1273077 w 3182692"/>
-              <a:gd name="csY2" fmla="*/ 0 h 18288"/>
-              <a:gd name="csX3" fmla="*/ 1909615 w 3182692"/>
-              <a:gd name="csY3" fmla="*/ 0 h 18288"/>
-              <a:gd name="csX4" fmla="*/ 2482500 w 3182692"/>
-              <a:gd name="csY4" fmla="*/ 0 h 18288"/>
-              <a:gd name="csX5" fmla="*/ 3182692 w 3182692"/>
-              <a:gd name="csY5" fmla="*/ 0 h 18288"/>
-              <a:gd name="csX6" fmla="*/ 3182692 w 3182692"/>
-              <a:gd name="csY6" fmla="*/ 18288 h 18288"/>
-              <a:gd name="csX7" fmla="*/ 2609807 w 3182692"/>
-              <a:gd name="csY7" fmla="*/ 18288 h 18288"/>
-              <a:gd name="csX8" fmla="*/ 2068750 w 3182692"/>
-              <a:gd name="csY8" fmla="*/ 18288 h 18288"/>
-              <a:gd name="csX9" fmla="*/ 1432211 w 3182692"/>
-              <a:gd name="csY9" fmla="*/ 18288 h 18288"/>
-              <a:gd name="csX10" fmla="*/ 859327 w 3182692"/>
-              <a:gd name="csY10" fmla="*/ 18288 h 18288"/>
-              <a:gd name="csX11" fmla="*/ 0 w 3182692"/>
-              <a:gd name="csY11" fmla="*/ 18288 h 18288"/>
-              <a:gd name="csX12" fmla="*/ 0 w 3182692"/>
-              <a:gd name="csY12" fmla="*/ 0 h 18288"/>
-            </a:gdLst>
-            <a:ahLst/>
-            <a:cxnLst>
-              <a:cxn ang="0">
-                <a:pos x="csX0" y="csY0"/>
-              </a:cxn>
-              <a:cxn ang="0">
-                <a:pos x="csX1" y="csY1"/>
-              </a:cxn>
-              <a:cxn ang="0">
-                <a:pos x="csX2" y="csY2"/>
-              </a:cxn>
-              <a:cxn ang="0">
-                <a:pos x="csX3" y="csY3"/>
-              </a:cxn>
-              <a:cxn ang="0">
-                <a:pos x="csX4" y="csY4"/>
-              </a:cxn>
-              <a:cxn ang="0">
-                <a:pos x="csX5" y="csY5"/>
-              </a:cxn>
-              <a:cxn ang="0">
-                <a:pos x="csX6" y="csY6"/>
-              </a:cxn>
-              <a:cxn ang="0">
-                <a:pos x="csX7" y="csY7"/>
-              </a:cxn>
-              <a:cxn ang="0">
-                <a:pos x="csX8" y="csY8"/>
-              </a:cxn>
-              <a:cxn ang="0">
-                <a:pos x="csX9" y="csY9"/>
-              </a:cxn>
-              <a:cxn ang="0">
-                <a:pos x="csX10" y="csY10"/>
-              </a:cxn>
-              <a:cxn ang="0">
-                <a:pos x="csX11" y="csY11"/>
-              </a:cxn>
-              <a:cxn ang="0">
-                <a:pos x="csX12" y="csY12"/>
-              </a:cxn>
-            </a:cxnLst>
-            <a:rect l="l" t="t" r="r" b="b"/>
-            <a:pathLst>
-              <a:path w="3182692" h="18288" fill="none" extrusionOk="0">
-                <a:moveTo>
-                  <a:pt x="0" y="0"/>
-                </a:moveTo>
-                <a:cubicBezTo>
-                  <a:pt x="253588" y="25878"/>
-                  <a:pt x="409323" y="-5359"/>
-                  <a:pt x="636538" y="0"/>
-                </a:cubicBezTo>
-                <a:cubicBezTo>
-                  <a:pt x="863753" y="5359"/>
-                  <a:pt x="1007727" y="-28"/>
-                  <a:pt x="1273077" y="0"/>
-                </a:cubicBezTo>
-                <a:cubicBezTo>
-                  <a:pt x="1538427" y="28"/>
-                  <a:pt x="1698640" y="-12775"/>
-                  <a:pt x="1909615" y="0"/>
-                </a:cubicBezTo>
-                <a:cubicBezTo>
-                  <a:pt x="2120590" y="12775"/>
-                  <a:pt x="2210293" y="-21823"/>
-                  <a:pt x="2482500" y="0"/>
-                </a:cubicBezTo>
-                <a:cubicBezTo>
-                  <a:pt x="2754708" y="21823"/>
-                  <a:pt x="3004133" y="-28750"/>
-                  <a:pt x="3182692" y="0"/>
-                </a:cubicBezTo>
-                <a:cubicBezTo>
-                  <a:pt x="3183134" y="4516"/>
-                  <a:pt x="3181865" y="12266"/>
-                  <a:pt x="3182692" y="18288"/>
-                </a:cubicBezTo>
-                <a:cubicBezTo>
-                  <a:pt x="2947402" y="22440"/>
-                  <a:pt x="2876226" y="27191"/>
-                  <a:pt x="2609807" y="18288"/>
-                </a:cubicBezTo>
-                <a:cubicBezTo>
-                  <a:pt x="2343389" y="9385"/>
-                  <a:pt x="2326689" y="25579"/>
-                  <a:pt x="2068750" y="18288"/>
-                </a:cubicBezTo>
-                <a:cubicBezTo>
-                  <a:pt x="1810811" y="10997"/>
-                  <a:pt x="1713836" y="48219"/>
-                  <a:pt x="1432211" y="18288"/>
-                </a:cubicBezTo>
-                <a:cubicBezTo>
-                  <a:pt x="1150586" y="-11643"/>
-                  <a:pt x="982765" y="3747"/>
-                  <a:pt x="859327" y="18288"/>
-                </a:cubicBezTo>
-                <a:cubicBezTo>
-                  <a:pt x="735889" y="32829"/>
-                  <a:pt x="254183" y="35231"/>
-                  <a:pt x="0" y="18288"/>
-                </a:cubicBezTo>
-                <a:cubicBezTo>
-                  <a:pt x="-306" y="11477"/>
-                  <a:pt x="485" y="4355"/>
-                  <a:pt x="0" y="0"/>
-                </a:cubicBezTo>
-                <a:close/>
-              </a:path>
-              <a:path w="3182692" h="18288" stroke="0" extrusionOk="0">
-                <a:moveTo>
-                  <a:pt x="0" y="0"/>
-                </a:moveTo>
-                <a:cubicBezTo>
-                  <a:pt x="243108" y="-22426"/>
-                  <a:pt x="387854" y="22949"/>
-                  <a:pt x="572885" y="0"/>
-                </a:cubicBezTo>
-                <a:cubicBezTo>
-                  <a:pt x="757916" y="-22949"/>
-                  <a:pt x="923707" y="6797"/>
-                  <a:pt x="1113942" y="0"/>
-                </a:cubicBezTo>
-                <a:cubicBezTo>
-                  <a:pt x="1304177" y="-6797"/>
-                  <a:pt x="1495991" y="20627"/>
-                  <a:pt x="1686827" y="0"/>
-                </a:cubicBezTo>
-                <a:cubicBezTo>
-                  <a:pt x="1877663" y="-20627"/>
-                  <a:pt x="2170182" y="-20672"/>
-                  <a:pt x="2323365" y="0"/>
-                </a:cubicBezTo>
-                <a:cubicBezTo>
-                  <a:pt x="2476548" y="20672"/>
-                  <a:pt x="2919164" y="6097"/>
-                  <a:pt x="3182692" y="0"/>
-                </a:cubicBezTo>
-                <a:cubicBezTo>
-                  <a:pt x="3183269" y="4624"/>
-                  <a:pt x="3183511" y="11191"/>
-                  <a:pt x="3182692" y="18288"/>
-                </a:cubicBezTo>
-                <a:cubicBezTo>
-                  <a:pt x="3026065" y="-10849"/>
-                  <a:pt x="2775006" y="23067"/>
-                  <a:pt x="2546154" y="18288"/>
-                </a:cubicBezTo>
-                <a:cubicBezTo>
-                  <a:pt x="2317302" y="13509"/>
-                  <a:pt x="2168173" y="-8513"/>
-                  <a:pt x="1845961" y="18288"/>
-                </a:cubicBezTo>
-                <a:cubicBezTo>
-                  <a:pt x="1523749" y="45089"/>
-                  <a:pt x="1450078" y="-844"/>
-                  <a:pt x="1304904" y="18288"/>
-                </a:cubicBezTo>
-                <a:cubicBezTo>
-                  <a:pt x="1159730" y="37420"/>
-                  <a:pt x="942635" y="-10021"/>
-                  <a:pt x="604711" y="18288"/>
-                </a:cubicBezTo>
-                <a:cubicBezTo>
-                  <a:pt x="266787" y="46597"/>
-                  <a:pt x="141927" y="-8395"/>
-                  <a:pt x="0" y="18288"/>
-                </a:cubicBezTo>
-                <a:cubicBezTo>
-                  <a:pt x="-171" y="12755"/>
-                  <a:pt x="-690" y="7930"/>
-                  <a:pt x="0" y="0"/>
-                </a:cubicBezTo>
-                <a:close/>
-              </a:path>
-            </a:pathLst>
-          </a:custGeom>
-          <a:solidFill>
-            <a:schemeClr val="accent2"/>
-          </a:solidFill>
-          <a:ln w="41275" cap="rnd">
-            <a:solidFill>
-              <a:schemeClr val="accent2"/>
-            </a:solidFill>
-            <a:round/>
-            <a:extLst>
-              <a:ext uri="{C807C97D-BFC1-408E-A445-0C87EB9F89A2}">
-                <ask:lineSketchStyleProps xmlns:ask="http://schemas.microsoft.com/office/drawing/2018/sketchyshapes" sd="2727557108">
-                  <a:prstGeom prst="rect">
-                    <a:avLst/>
-                  </a:prstGeom>
-                  <ask:type>
-                    <ask:lineSketchFreehand/>
-                  </ask:type>
-                </ask:lineSketchStyleProps>
-              </a:ext>
-            </a:extLst>
-          </a:ln>
-        </p:spPr>
-        <p:style>
-          <a:lnRef idx="2">
-            <a:schemeClr val="accent1">
-              <a:shade val="50000"/>
-            </a:schemeClr>
-          </a:lnRef>
-          <a:fillRef idx="1">
-            <a:schemeClr val="accent1"/>
-          </a:fillRef>
-          <a:effectRef idx="0">
-            <a:schemeClr val="accent1"/>
-          </a:effectRef>
-          <a:fontRef idx="minor">
-            <a:schemeClr val="lt1"/>
-          </a:fontRef>
-        </p:style>
-        <p:txBody>
-          <a:bodyPr rtlCol="0" anchor="ctr"/>
-          <a:lstStyle/>
-          <a:p>
-            <a:pPr algn="ctr"/>
-            <a:endParaRPr lang="en-US"/>
-          </a:p>
-        </p:txBody>
-      </p:sp>
     </p:spTree>
+    <p:extLst>
+      <p:ext uri="{BB962C8B-B14F-4D97-AF65-F5344CB8AC3E}">
+        <p14:creationId xmlns:p14="http://schemas.microsoft.com/office/powerpoint/2010/main" val="1440866804"/>
+      </p:ext>
+    </p:extLst>
   </p:cSld>
   <p:clrMapOvr>
     <a:masterClrMapping/>
@@ -33783,7 +32712,7 @@
           <a:lstStyle/>
           <a:p>
             <a:r>
-              <a:rPr lang="en-GB" sz="3100">
+              <a:rPr lang="en-GB" sz="3100" dirty="0">
                 <a:solidFill>
                   <a:schemeClr val="tx2"/>
                 </a:solidFill>
@@ -33805,8 +32734,8 @@
         </p:nvSpPr>
         <p:spPr>
           <a:xfrm>
-            <a:off x="4629150" y="804672"/>
-            <a:ext cx="3915918" cy="5230368"/>
+            <a:off x="4184073" y="804672"/>
+            <a:ext cx="4360995" cy="5230368"/>
           </a:xfrm>
         </p:spPr>
         <p:txBody>
@@ -33819,12 +32748,46 @@
               <a:defRPr sz="2400"/>
             </a:pPr>
             <a:r>
-              <a:rPr lang="en-GB" sz="1600">
+              <a:rPr lang="en-GB" sz="2000" dirty="0">
                 <a:solidFill>
                   <a:schemeClr val="tx2"/>
                 </a:solidFill>
               </a:rPr>
-              <a:t>Fonte: sklearn.datasets.load_wine</a:t>
+              <a:t>Fonte: </a:t>
+            </a:r>
+            <a:r>
+              <a:rPr lang="en-GB" sz="2000" dirty="0" err="1">
+                <a:solidFill>
+                  <a:schemeClr val="tx2"/>
+                </a:solidFill>
+              </a:rPr>
+              <a:t>sklearn.datasets.load_wine</a:t>
+            </a:r>
+            <a:endParaRPr lang="en-GB" sz="2000" dirty="0">
+              <a:solidFill>
+                <a:schemeClr val="tx2"/>
+              </a:solidFill>
+            </a:endParaRPr>
+          </a:p>
+          <a:p>
+            <a:pPr>
+              <a:defRPr sz="2400"/>
+            </a:pPr>
+            <a:r>
+              <a:rPr lang="en-GB" sz="2000" dirty="0" err="1">
+                <a:solidFill>
+                  <a:schemeClr val="tx2"/>
+                </a:solidFill>
+              </a:rPr>
+              <a:t>Campioni</a:t>
+            </a:r>
+            <a:r>
+              <a:rPr lang="en-GB" sz="2000" dirty="0">
+                <a:solidFill>
+                  <a:schemeClr val="tx2"/>
+                </a:solidFill>
+              </a:rPr>
+              <a:t>: 178</a:t>
             </a:r>
           </a:p>
           <a:p>
@@ -33832,20 +32795,7 @@
               <a:defRPr sz="2400"/>
             </a:pPr>
             <a:r>
-              <a:rPr lang="en-GB" sz="1600">
-                <a:solidFill>
-                  <a:schemeClr val="tx2"/>
-                </a:solidFill>
-              </a:rPr>
-              <a:t>Campioni: 178</a:t>
-            </a:r>
-          </a:p>
-          <a:p>
-            <a:pPr>
-              <a:defRPr sz="2400"/>
-            </a:pPr>
-            <a:r>
-              <a:rPr lang="en-GB" sz="1600">
+              <a:rPr lang="en-GB" sz="2000" dirty="0">
                 <a:solidFill>
                   <a:schemeClr val="tx2"/>
                 </a:solidFill>
@@ -33858,7 +32808,7 @@
               <a:defRPr sz="2400"/>
             </a:pPr>
             <a:r>
-              <a:rPr lang="en-GB" sz="1600">
+              <a:rPr lang="en-GB" sz="2000" dirty="0">
                 <a:solidFill>
                   <a:schemeClr val="tx2"/>
                 </a:solidFill>
@@ -33871,12 +32821,68 @@
               <a:defRPr sz="2000"/>
             </a:pPr>
             <a:r>
-              <a:rPr lang="en-GB" sz="1600">
+              <a:rPr lang="en-GB" sz="2000" dirty="0" err="1">
                 <a:solidFill>
                   <a:schemeClr val="tx2"/>
                 </a:solidFill>
               </a:rPr>
-              <a:t>Esempi feature: alcohol, malic_acid, flavanoids, color_intensity, proline</a:t>
+              <a:t>Esempi</a:t>
+            </a:r>
+            <a:r>
+              <a:rPr lang="en-GB" sz="2000" dirty="0">
+                <a:solidFill>
+                  <a:schemeClr val="tx2"/>
+                </a:solidFill>
+              </a:rPr>
+              <a:t> feature: alcohol, </a:t>
+            </a:r>
+            <a:r>
+              <a:rPr lang="en-GB" sz="2000" dirty="0" err="1">
+                <a:solidFill>
+                  <a:schemeClr val="tx2"/>
+                </a:solidFill>
+              </a:rPr>
+              <a:t>malic_acid</a:t>
+            </a:r>
+            <a:r>
+              <a:rPr lang="en-GB" sz="2000" dirty="0">
+                <a:solidFill>
+                  <a:schemeClr val="tx2"/>
+                </a:solidFill>
+              </a:rPr>
+              <a:t>, </a:t>
+            </a:r>
+            <a:r>
+              <a:rPr lang="en-GB" sz="2000" dirty="0" err="1">
+                <a:solidFill>
+                  <a:schemeClr val="tx2"/>
+                </a:solidFill>
+              </a:rPr>
+              <a:t>flavanoids</a:t>
+            </a:r>
+            <a:r>
+              <a:rPr lang="en-GB" sz="2000" dirty="0">
+                <a:solidFill>
+                  <a:schemeClr val="tx2"/>
+                </a:solidFill>
+              </a:rPr>
+              <a:t>, </a:t>
+            </a:r>
+            <a:r>
+              <a:rPr lang="en-GB" sz="2000" dirty="0" err="1">
+                <a:solidFill>
+                  <a:schemeClr val="tx2"/>
+                </a:solidFill>
+              </a:rPr>
+              <a:t>color_intensity</a:t>
+            </a:r>
+            <a:r>
+              <a:rPr lang="en-GB" sz="2000" dirty="0">
+                <a:solidFill>
+                  <a:schemeClr val="tx2"/>
+                </a:solidFill>
+              </a:rPr>
+              <a:t>, proline</a:t>
             </a:r>
           </a:p>
         </p:txBody>
@@ -37555,7 +36561,7 @@
               <a:defRPr sz="2400"/>
             </a:pPr>
             <a:r>
-              <a:rPr lang="en-GB" sz="1800" dirty="0" err="1">
+              <a:rPr lang="en-GB" sz="2000" dirty="0" err="1">
                 <a:solidFill>
                   <a:schemeClr val="tx2"/>
                 </a:solidFill>
@@ -37563,7 +36569,7 @@
               <a:t>StandardScaler</a:t>
             </a:r>
             <a:r>
-              <a:rPr lang="en-GB" sz="1800" dirty="0">
+              <a:rPr lang="en-GB" sz="2000" dirty="0">
                 <a:solidFill>
                   <a:schemeClr val="tx2"/>
                 </a:solidFill>
@@ -37571,7 +36577,7 @@
               <a:t> per </a:t>
             </a:r>
             <a:r>
-              <a:rPr lang="en-GB" sz="1800" dirty="0" err="1">
+              <a:rPr lang="en-GB" sz="2000" dirty="0" err="1">
                 <a:solidFill>
                   <a:schemeClr val="tx2"/>
                 </a:solidFill>
@@ -37579,7 +36585,7 @@
               <a:t>portare</a:t>
             </a:r>
             <a:r>
-              <a:rPr lang="en-GB" sz="1800" dirty="0">
+              <a:rPr lang="en-GB" sz="2000" dirty="0">
                 <a:solidFill>
                   <a:schemeClr val="tx2"/>
                 </a:solidFill>
@@ -37587,7 +36593,7 @@
               <a:t> tutte le feature </a:t>
             </a:r>
             <a:r>
-              <a:rPr lang="en-GB" sz="1800" dirty="0" err="1">
+              <a:rPr lang="en-GB" sz="2000" dirty="0" err="1">
                 <a:solidFill>
                   <a:schemeClr val="tx2"/>
                 </a:solidFill>
@@ -37595,7 +36601,7 @@
               <a:t>su</a:t>
             </a:r>
             <a:r>
-              <a:rPr lang="en-GB" sz="1800" dirty="0">
+              <a:rPr lang="en-GB" sz="2000" dirty="0">
                 <a:solidFill>
                   <a:schemeClr val="tx2"/>
                 </a:solidFill>
@@ -37603,14 +36609,14 @@
               <a:t> scala </a:t>
             </a:r>
             <a:r>
-              <a:rPr lang="en-GB" sz="1800" dirty="0" err="1">
+              <a:rPr lang="en-GB" sz="2000" dirty="0" err="1">
                 <a:solidFill>
                   <a:schemeClr val="tx2"/>
                 </a:solidFill>
               </a:rPr>
               <a:t>comparabile</a:t>
             </a:r>
-            <a:endParaRPr lang="en-GB" sz="1800" dirty="0">
+            <a:endParaRPr lang="en-GB" sz="2000" dirty="0">
               <a:solidFill>
                 <a:schemeClr val="tx2"/>
               </a:solidFill>
@@ -37621,7 +36627,7 @@
               <a:defRPr sz="2400"/>
             </a:pPr>
             <a:r>
-              <a:rPr lang="en-GB" sz="1800" dirty="0" err="1">
+              <a:rPr lang="en-GB" sz="2000" dirty="0" err="1">
                 <a:solidFill>
                   <a:schemeClr val="tx2"/>
                 </a:solidFill>
@@ -37629,7 +36635,7 @@
               <a:t>Importante</a:t>
             </a:r>
             <a:r>
-              <a:rPr lang="en-GB" sz="1800" dirty="0">
+              <a:rPr lang="en-GB" sz="2000" dirty="0">
                 <a:solidFill>
                   <a:schemeClr val="tx2"/>
                 </a:solidFill>
@@ -37637,7 +36643,7 @@
               <a:t> per </a:t>
             </a:r>
             <a:r>
-              <a:rPr lang="en-GB" sz="1800" dirty="0" err="1">
+              <a:rPr lang="en-GB" sz="2000" dirty="0" err="1">
                 <a:solidFill>
                   <a:schemeClr val="tx2"/>
                 </a:solidFill>
@@ -37645,7 +36651,7 @@
               <a:t>modelli</a:t>
             </a:r>
             <a:r>
-              <a:rPr lang="en-GB" sz="1800" dirty="0">
+              <a:rPr lang="en-GB" sz="2000" dirty="0">
                 <a:solidFill>
                   <a:schemeClr val="tx2"/>
                 </a:solidFill>
@@ -37653,7 +36659,7 @@
               <a:t> </a:t>
             </a:r>
             <a:r>
-              <a:rPr lang="en-GB" sz="1800" dirty="0" err="1">
+              <a:rPr lang="en-GB" sz="2000" dirty="0" err="1">
                 <a:solidFill>
                   <a:schemeClr val="tx2"/>
                 </a:solidFill>
@@ -37661,7 +36667,7 @@
               <a:t>basati</a:t>
             </a:r>
             <a:r>
-              <a:rPr lang="en-GB" sz="1800" dirty="0">
+              <a:rPr lang="en-GB" sz="2000" dirty="0">
                 <a:solidFill>
                   <a:schemeClr val="tx2"/>
                 </a:solidFill>
@@ -37669,7 +36675,7 @@
               <a:t> </a:t>
             </a:r>
             <a:r>
-              <a:rPr lang="en-GB" sz="1800" dirty="0" err="1">
+              <a:rPr lang="en-GB" sz="2000" dirty="0" err="1">
                 <a:solidFill>
                   <a:schemeClr val="tx2"/>
                 </a:solidFill>
@@ -37677,7 +36683,7 @@
               <a:t>su</a:t>
             </a:r>
             <a:r>
-              <a:rPr lang="en-GB" sz="1800" dirty="0">
+              <a:rPr lang="en-GB" sz="2000" dirty="0">
                 <a:solidFill>
                   <a:schemeClr val="tx2"/>
                 </a:solidFill>
@@ -37685,7 +36691,7 @@
               <a:t> </a:t>
             </a:r>
             <a:r>
-              <a:rPr lang="en-GB" sz="1800" dirty="0" err="1">
+              <a:rPr lang="en-GB" sz="2000" dirty="0" err="1">
                 <a:solidFill>
                   <a:schemeClr val="tx2"/>
                 </a:solidFill>
@@ -37693,7 +36699,7 @@
               <a:t>distanze</a:t>
             </a:r>
             <a:r>
-              <a:rPr lang="en-GB" sz="1800" dirty="0">
+              <a:rPr lang="en-GB" sz="2000" dirty="0">
                 <a:solidFill>
                   <a:schemeClr val="tx2"/>
                 </a:solidFill>
@@ -37706,7 +36712,7 @@
               <a:defRPr sz="2400"/>
             </a:pPr>
             <a:r>
-              <a:rPr lang="en-GB" sz="1800" dirty="0">
+              <a:rPr lang="en-GB" sz="2000" dirty="0">
                 <a:solidFill>
                   <a:schemeClr val="tx2"/>
                 </a:solidFill>
@@ -37714,7 +36720,7 @@
               <a:t>Pipeline </a:t>
             </a:r>
             <a:r>
-              <a:rPr lang="en-GB" sz="1800" dirty="0" err="1">
+              <a:rPr lang="en-GB" sz="2000" dirty="0" err="1">
                 <a:solidFill>
                   <a:schemeClr val="tx2"/>
                 </a:solidFill>
@@ -37722,7 +36728,7 @@
               <a:t>evita</a:t>
             </a:r>
             <a:r>
-              <a:rPr lang="en-GB" sz="1800" dirty="0">
+              <a:rPr lang="en-GB" sz="2000" dirty="0">
                 <a:solidFill>
                   <a:schemeClr val="tx2"/>
                 </a:solidFill>
@@ -37730,7 +36736,7 @@
               <a:t> </a:t>
             </a:r>
             <a:r>
-              <a:rPr lang="en-GB" sz="1800" dirty="0" err="1">
+              <a:rPr lang="en-GB" sz="2000" dirty="0" err="1">
                 <a:solidFill>
                   <a:schemeClr val="tx2"/>
                 </a:solidFill>
@@ -37738,7 +36744,7 @@
               <a:t>errori</a:t>
             </a:r>
             <a:r>
-              <a:rPr lang="en-GB" sz="1800" dirty="0">
+              <a:rPr lang="en-GB" sz="2000" dirty="0">
                 <a:solidFill>
                   <a:schemeClr val="tx2"/>
                 </a:solidFill>
@@ -37746,7 +36752,7 @@
               <a:t> di preprocessing e </a:t>
             </a:r>
             <a:r>
-              <a:rPr lang="en-GB" sz="1800" dirty="0" err="1">
+              <a:rPr lang="en-GB" sz="2000" dirty="0" err="1">
                 <a:solidFill>
                   <a:schemeClr val="tx2"/>
                 </a:solidFill>
@@ -37754,7 +36760,7 @@
               <a:t>semplifica</a:t>
             </a:r>
             <a:r>
-              <a:rPr lang="en-GB" sz="1800" dirty="0">
+              <a:rPr lang="en-GB" sz="2000" dirty="0">
                 <a:solidFill>
                   <a:schemeClr val="tx2"/>
                 </a:solidFill>
@@ -37799,7 +36805,12 @@
             <p:ph type="title"/>
           </p:nvPr>
         </p:nvSpPr>
-        <p:spPr/>
+        <p:spPr>
+          <a:xfrm>
+            <a:off x="457200" y="457200"/>
+            <a:ext cx="8229600" cy="1143000"/>
+          </a:xfrm>
+        </p:spPr>
         <p:txBody>
           <a:bodyPr>
             <a:normAutofit fontScale="90000"/>
@@ -37807,7 +36818,20 @@
           <a:lstStyle/>
           <a:p>
             <a:r>
-              <a:t>Modello 1: K-Nearest Neighbors (KNN)</a:t>
+              <a:rPr dirty="0" err="1">
+                <a:solidFill>
+                  <a:schemeClr val="tx2"/>
+                </a:solidFill>
+              </a:rPr>
+              <a:t>Modello</a:t>
+            </a:r>
+            <a:r>
+              <a:rPr dirty="0">
+                <a:solidFill>
+                  <a:schemeClr val="tx2"/>
+                </a:solidFill>
+              </a:rPr>
+              <a:t> 1: K-Nearest Neighbors (KNN)</a:t>
             </a:r>
           </a:p>
         </p:txBody>
@@ -37928,14 +36952,26 @@
           <a:lstStyle/>
           <a:p>
             <a:r>
-              <a:rPr lang="en-GB" dirty="0" err="1"/>
+              <a:rPr lang="en-GB" dirty="0" err="1">
+                <a:solidFill>
+                  <a:schemeClr val="tx2"/>
+                </a:solidFill>
+              </a:rPr>
               <a:t>Modello</a:t>
             </a:r>
             <a:r>
-              <a:rPr lang="en-GB" dirty="0"/>
+              <a:rPr lang="en-GB" dirty="0">
+                <a:solidFill>
+                  <a:schemeClr val="tx2"/>
+                </a:solidFill>
+              </a:rPr>
               <a:t> 2: Logistic Regression</a:t>
             </a:r>
-            <a:endParaRPr dirty="0"/>
+            <a:endParaRPr dirty="0">
+              <a:solidFill>
+                <a:schemeClr val="tx2"/>
+              </a:solidFill>
+            </a:endParaRPr>
           </a:p>
         </p:txBody>
       </p:sp>
@@ -40651,32 +39687,49 @@
       </p:grpSp>
       <p:pic>
         <p:nvPicPr>
-          <p:cNvPr id="5" name="Picture 4">
+          <p:cNvPr id="1026" name="Picture 2" descr="confusion matrix">
             <a:extLst>
               <a:ext uri="{FF2B5EF4-FFF2-40B4-BE49-F238E27FC236}">
-                <a16:creationId xmlns:a16="http://schemas.microsoft.com/office/drawing/2014/main" id="{DA300B99-2C2D-B7D7-9546-0193F85931B3}"/>
+                <a16:creationId xmlns:a16="http://schemas.microsoft.com/office/drawing/2014/main" id="{C301AB18-AD72-08B4-B777-F484FEDB470F}"/>
               </a:ext>
             </a:extLst>
           </p:cNvPr>
           <p:cNvPicPr>
-            <a:picLocks noChangeAspect="1"/>
+            <a:picLocks noChangeAspect="1" noChangeArrowheads="1"/>
           </p:cNvPicPr>
           <p:nvPr/>
         </p:nvPicPr>
         <p:blipFill>
-          <a:blip r:embed="rId2"/>
+          <a:blip r:embed="rId2">
+            <a:extLst>
+              <a:ext uri="{28A0092B-C50C-407E-A947-70E740481C1C}">
+                <a14:useLocalDpi xmlns:a14="http://schemas.microsoft.com/office/drawing/2010/main" val="0"/>
+              </a:ext>
+            </a:extLst>
+          </a:blip>
+          <a:srcRect/>
           <a:stretch>
             <a:fillRect/>
           </a:stretch>
         </p:blipFill>
-        <p:spPr>
+        <p:spPr bwMode="auto">
           <a:xfrm>
-            <a:off x="643866" y="3859188"/>
-            <a:ext cx="7738134" cy="2166676"/>
+            <a:off x="559546" y="3639815"/>
+            <a:ext cx="8024677" cy="2247188"/>
           </a:xfrm>
           <a:prstGeom prst="rect">
             <a:avLst/>
           </a:prstGeom>
+          <a:noFill/>
+          <a:extLst>
+            <a:ext uri="{909E8E84-426E-40DD-AFC4-6F175D3DCCD1}">
+              <a14:hiddenFill xmlns:a14="http://schemas.microsoft.com/office/drawing/2010/main">
+                <a:solidFill>
+                  <a:srgbClr val="FFFFFF"/>
+                </a:solidFill>
+              </a14:hiddenFill>
+            </a:ext>
+          </a:extLst>
         </p:spPr>
       </p:pic>
     </p:spTree>
